--- a/decks/hist-hastings/hist-hastings_ch6_why-william-won.pptx
+++ b/decks/hist-hastings/hist-hastings_ch6_why-william-won.pptx
@@ -126,29 +126,29 @@
   <p:extLst>
     <p:ext uri="{521415D9-36F7-43E2-AB2F-B90AF26B5E84}">
       <p14:sectionLst xmlns:p14="http://schemas.microsoft.com/office/powerpoint/2010/main">
-        <p14:section name="Opening" id="{3c91b0e1-a5ec-a8ad-cf95-2d06ba5c2baa}">
+        <p14:section name="Opening" id="{5120f1ee-d971-9bfc-e510-5a15882236c3}">
           <p14:sldIdLst>
             <p14:sldId id="256"/>
           </p14:sldIdLst>
         </p14:section>
-        <p14:section name="Gate" id="{705f9a04-7ce7-a871-bf60-51f3e82e8f6b}">
+        <p14:section name="Gate" id="{2f357430-898c-7934-3510-3b3cfd990d9a}">
           <p14:sldIdLst>
             <p14:sldId id="257"/>
             <p14:sldId id="258"/>
           </p14:sldIdLst>
         </p14:section>
-        <p14:section name="Pre-teach" id="{b9e03a25-f085-1871-1200-68a3ab568cf2}">
+        <p14:section name="Pre-teach" id="{80d682b2-4152-88a8-bb27-50336905e173}">
           <p14:sldIdLst>
             <p14:sldId id="259"/>
           </p14:sldIdLst>
         </p14:section>
-        <p14:section name="Read-along" id="{5f68dd7c-9b7f-f94f-aea8-5566c95448c1}">
+        <p14:section name="Read-along" id="{fc695573-2ff5-27b2-99ec-964ff77d13e1}">
           <p14:sldIdLst>
             <p14:sldId id="260"/>
             <p14:sldId id="261"/>
           </p14:sldIdLst>
         </p14:section>
-        <p14:section name="Teach" id="{39401c0e-0a46-ffc5-e74d-c099ebd0ff41}">
+        <p14:section name="Teach" id="{db3ba7a1-e732-f83d-6e77-056ee84f0102}">
           <p14:sldIdLst>
             <p14:sldId id="262"/>
             <p14:sldId id="263"/>
@@ -156,7 +156,7 @@
             <p14:sldId id="265"/>
           </p14:sldIdLst>
         </p14:section>
-        <p14:section name="Routes" id="{5dedbb99-e51c-e1d2-1f24-22846c15aa98}">
+        <p14:section name="Routes" id="{698a78b6-03e7-1fd6-51b9-5ac1688be816}">
           <p14:sldIdLst>
             <p14:sldId id="266"/>
             <p14:sldId id="267"/>
@@ -166,12 +166,12 @@
             <p14:sldId id="271"/>
           </p14:sldIdLst>
         </p14:section>
-        <p14:section name="Close" id="{5910b1eb-3ddb-5c9f-11e0-d6a255146a1d}">
+        <p14:section name="Close" id="{fb8baa09-158b-5f8e-6761-653c20da0afb}">
           <p14:sldIdLst>
             <p14:sldId id="272"/>
           </p14:sldIdLst>
         </p14:section>
-        <p14:section name="Answers" id="{5a79698f-fd92-a4f2-83fb-d8d9d312050c}">
+        <p14:section name="Answers" id="{8e5bc9ad-57f6-a106-3005-73ecac799e1f}">
           <p14:sldIdLst>
             <p14:sldId id="273"/>
             <p14:sldId id="274"/>
@@ -1331,7 +1331,7 @@
               <a:rPr lang="en-US" dirty="0"/>
               <a:t>Exit ticket — individual, silent, on a slip or mini-whiteboard. Recall before help: no notes, no lanes, no hints. Collect before pupils leave.
 Question: In history, what is a cause?
-Answer: D   A reason why something happened. Causes are the reasons why something happens. For Hastings, a cause is anything that helped William or hurt Harold.
+Answer: A   A reason why something happened. Causes are the reasons why something happens. For Hastings, a cause is anything that helped William or hurt Harold.
 Source of this question: gate item 1 re-asked (options rotated) — this chapter has no third quick-check module.
 The ebook also holds task 3, "Was William just lucky?", for homework or the next lesson's do now.
 Sort the slips: correct → ready to move on; incorrect → start next lesson in the pre-teach group, with the read-along and the Support lane. Same destination next time.</a:t>
@@ -1605,9 +1605,9 @@
             <a:r>
               <a:rPr lang="en-US" dirty="0"/>
               <a:t>Do now — retrieval. Silent, no notes, no help: recall comes before any support. Give about four minutes.
-1. In history, what is a cause?  →  A   A reason why something happened
+1. In history, what is a cause?  →  B   A reason why something happened
 2. Things that happened by chance, which William or Harold could not control, are grouped under the factor called ___.  →  luck
-3. According to the historian Marc Morris, what was the lucky event that finally decided the Battle of Hastings?  →  A   William survived and Harold died, when it could have been either of them
+3. According to the historian Marc Morris, what was the lucky event that finally decided the Battle of Hastings?  →  D   William survived and Harold died, when it could have been either of them
 Circulate: who gets 3/3 (Stretch route), 2/3 (Core), 0–1 (Support)? Use this to route pupils later in the lesson.</a:t>
             </a:r>
             <a:endParaRPr lang="en-US" dirty="0"/>
@@ -1697,7 +1697,7 @@
             <a:r>
               <a:rPr lang="en-US" dirty="0"/>
               <a:t>Answers — exit ticket: Exit ticket. Reveal the answer; pupils mark their own work in a different colour, then read the "why" together. Same destination for every lane, so one answer serves the whole class.
-Answer: D   A reason why something happened
+Answer: A   A reason why something happened
 Why: Causes are the reasons why something happens. For Hastings, a cause is anything that helped William or hurt Harold.
 Ask a Support pupil to explain one step, and a Stretch pupil to share their extension.</a:t>
             </a:r>
@@ -1788,9 +1788,9 @@
             <a:r>
               <a:rPr lang="en-US" dirty="0"/>
               <a:t>Answers — pupils mark their own in a different colour, then hands up for 3/3, 2/3, 1/3.
-1. A   A reason why something happened. Causes are the reasons why something happens. For Hastings, a cause is anything that helped William or hurt Harold.
+1. B   A reason why something happened. Causes are the reasons why something happens. For Hastings, a cause is anything that helped William or hurt Harold.
 2. luck. Luck is your lesson's name for chance events outside anyone's control, such as the wind changing.
-3. A   William survived and Harold died, when it could have been either of them. Morris argues that the battle was ultimately decided by which king died, and that this was chance: it could have been William.
+3. D   William survived and Harold died, when it could have been either of them. Morris argues that the battle was ultimately decided by which king died, and that this was chance: it could have been William.
 Say the route each score points to: 3/3 Stretch, 2/3 Core, 0–1 Support. Pupils may choose to move up.</a:t>
             </a:r>
             <a:endParaRPr lang="en-US" dirty="0"/>
@@ -9443,7 +9443,7 @@
                 <a:ea typeface="Calibri" pitchFamily="34" charset="-122"/>
                 <a:cs typeface="Calibri" pitchFamily="34" charset="-120"/>
               </a:rPr>
-              <a:t>A date on a timeline</a:t>
+              <a:t>A reason why something happened</a:t>
             </a:r>
             <a:endParaRPr lang="en-US" sz="2400" dirty="0"/>
           </a:p>
@@ -9480,7 +9480,7 @@
                 <a:ea typeface="Calibri" pitchFamily="34" charset="-122"/>
                 <a:cs typeface="Calibri" pitchFamily="34" charset="-120"/>
               </a:rPr>
-              <a:t>A battle between two armies</a:t>
+              <a:t>A date on a timeline</a:t>
             </a:r>
             <a:endParaRPr lang="en-US" sz="2400" dirty="0"/>
           </a:p>
@@ -9554,7 +9554,7 @@
                 <a:ea typeface="Calibri" pitchFamily="34" charset="-122"/>
                 <a:cs typeface="Calibri" pitchFamily="34" charset="-120"/>
               </a:rPr>
-              <a:t>A reason why something happened</a:t>
+              <a:t>A battle between two armies</a:t>
             </a:r>
             <a:endParaRPr lang="en-US" sz="2400" dirty="0"/>
           </a:p>
@@ -11211,7 +11211,7 @@
                 <a:ea typeface="Calibri" pitchFamily="34" charset="-122"/>
                 <a:cs typeface="Calibri" pitchFamily="34" charset="-120"/>
               </a:rPr>
-              <a:t>A reason why something happened</a:t>
+              <a:t>A battle between two armies</a:t>
             </a:r>
             <a:endParaRPr lang="en-US" sz="1800" dirty="0"/>
           </a:p>
@@ -11248,7 +11248,7 @@
                 <a:ea typeface="Calibri" pitchFamily="34" charset="-122"/>
                 <a:cs typeface="Calibri" pitchFamily="34" charset="-120"/>
               </a:rPr>
-              <a:t>A date on a timeline</a:t>
+              <a:t>A reason why something happened</a:t>
             </a:r>
             <a:endParaRPr lang="en-US" sz="1800" dirty="0"/>
           </a:p>
@@ -11285,7 +11285,7 @@
                 <a:ea typeface="Calibri" pitchFamily="34" charset="-122"/>
                 <a:cs typeface="Calibri" pitchFamily="34" charset="-120"/>
               </a:rPr>
-              <a:t>A battle between two armies</a:t>
+              <a:t>A date on a timeline</a:t>
             </a:r>
             <a:endParaRPr lang="en-US" sz="1800" dirty="0"/>
           </a:p>
@@ -11724,7 +11724,7 @@
                 <a:ea typeface="Calibri" pitchFamily="34" charset="-122"/>
                 <a:cs typeface="Calibri" pitchFamily="34" charset="-120"/>
               </a:rPr>
-              <a:t>William survived and Harold died, when it could have been either of them</a:t>
+              <a:t>Hardrada arrived to help William</a:t>
             </a:r>
             <a:endParaRPr lang="en-US" sz="2200" dirty="0"/>
           </a:p>
@@ -11835,7 +11835,7 @@
                 <a:ea typeface="Calibri" pitchFamily="34" charset="-122"/>
                 <a:cs typeface="Calibri" pitchFamily="34" charset="-120"/>
               </a:rPr>
-              <a:t>Hardrada arrived to help William</a:t>
+              <a:t>William survived and Harold died, when it could have been either of them</a:t>
             </a:r>
             <a:endParaRPr lang="en-US" sz="2200" dirty="0"/>
           </a:p>
@@ -12174,7 +12174,7 @@
                 <a:ea typeface="Cambria" pitchFamily="34" charset="-122"/>
                 <a:cs typeface="Cambria" pitchFamily="34" charset="-120"/>
               </a:rPr>
-              <a:t>D   A reason why something happened</a:t>
+              <a:t>A   A reason why something happened</a:t>
             </a:r>
             <a:endParaRPr lang="en-US" sz="1800" dirty="0"/>
           </a:p>
@@ -12695,7 +12695,7 @@
                 <a:ea typeface="Calibri" pitchFamily="34" charset="-122"/>
                 <a:cs typeface="Calibri" pitchFamily="34" charset="-120"/>
               </a:rPr>
-              <a:t>A   A reason why something happened</a:t>
+              <a:t>B   A reason why something happened</a:t>
             </a:r>
             <a:endParaRPr lang="en-US" sz="2200" dirty="0"/>
           </a:p>
@@ -13155,7 +13155,7 @@
                 <a:ea typeface="Calibri" pitchFamily="34" charset="-122"/>
                 <a:cs typeface="Calibri" pitchFamily="34" charset="-120"/>
               </a:rPr>
-              <a:t>A   William survived and Harold died, when it could have been either of them</a:t>
+              <a:t>D   William survived and Harold died, when it could have been either of them</a:t>
             </a:r>
             <a:endParaRPr lang="en-US" sz="2200" dirty="0"/>
           </a:p>

--- a/decks/hist-hastings/hist-hastings_ch6_why-william-won.pptx
+++ b/decks/hist-hastings/hist-hastings_ch6_why-william-won.pptx
@@ -126,29 +126,29 @@
   <p:extLst>
     <p:ext uri="{521415D9-36F7-43E2-AB2F-B90AF26B5E84}">
       <p14:sectionLst xmlns:p14="http://schemas.microsoft.com/office/powerpoint/2010/main">
-        <p14:section name="Opening" id="{5120f1ee-d971-9bfc-e510-5a15882236c3}">
+        <p14:section name="Opening" id="{35671938-1bca-fec1-1cfb-8f296e35ae3e}">
           <p14:sldIdLst>
             <p14:sldId id="256"/>
           </p14:sldIdLst>
         </p14:section>
-        <p14:section name="Gate" id="{2f357430-898c-7934-3510-3b3cfd990d9a}">
+        <p14:section name="Gate" id="{1f9b0b2e-3d38-4fba-0b85-0619a47ceef2}">
           <p14:sldIdLst>
             <p14:sldId id="257"/>
             <p14:sldId id="258"/>
           </p14:sldIdLst>
         </p14:section>
-        <p14:section name="Pre-teach" id="{80d682b2-4152-88a8-bb27-50336905e173}">
+        <p14:section name="Pre-teach" id="{f5ff84de-8ffc-5073-7dce-a081927e9fdf}">
           <p14:sldIdLst>
             <p14:sldId id="259"/>
           </p14:sldIdLst>
         </p14:section>
-        <p14:section name="Read-along" id="{fc695573-2ff5-27b2-99ec-964ff77d13e1}">
+        <p14:section name="Read-along" id="{dc330db3-6e4f-9183-bc3c-67f16b10604b}">
           <p14:sldIdLst>
             <p14:sldId id="260"/>
             <p14:sldId id="261"/>
           </p14:sldIdLst>
         </p14:section>
-        <p14:section name="Teach" id="{db3ba7a1-e732-f83d-6e77-056ee84f0102}">
+        <p14:section name="Teach" id="{20f73033-5d40-3eac-3803-48cc592a89eb}">
           <p14:sldIdLst>
             <p14:sldId id="262"/>
             <p14:sldId id="263"/>
@@ -156,7 +156,7 @@
             <p14:sldId id="265"/>
           </p14:sldIdLst>
         </p14:section>
-        <p14:section name="Routes" id="{698a78b6-03e7-1fd6-51b9-5ac1688be816}">
+        <p14:section name="Routes" id="{e73b6e31-0f7a-b972-fd47-b9e670829fbd}">
           <p14:sldIdLst>
             <p14:sldId id="266"/>
             <p14:sldId id="267"/>
@@ -166,12 +166,12 @@
             <p14:sldId id="271"/>
           </p14:sldIdLst>
         </p14:section>
-        <p14:section name="Close" id="{fb8baa09-158b-5f8e-6761-653c20da0afb}">
+        <p14:section name="Close" id="{b9e4627b-b1c0-557c-6a40-7e2bf71f22b9}">
           <p14:sldIdLst>
             <p14:sldId id="272"/>
           </p14:sldIdLst>
         </p14:section>
-        <p14:section name="Answers" id="{8e5bc9ad-57f6-a106-3005-73ecac799e1f}">
+        <p14:section name="Answers" id="{7eacd16a-a646-1441-cf6e-c78b3201cb9f}">
           <p14:sldIdLst>
             <p14:sldId id="273"/>
             <p14:sldId id="274"/>
